--- a/lvf_global_var/doc/patent/patent_figures.pptx
+++ b/lvf_global_var/doc/patent/patent_figures.pptx
@@ -19005,7 +19005,7 @@
                           <a:latin typeface="Malgun Gothic"/>
                           <a:ea typeface="Malgun Gothic"/>
                         </a:rPr>
-                        <a:t>S1</a:t>
+                        <a:t>T1</a:t>
                       </a:r>
                     </a:p>
                   </a:txBody>
@@ -19101,7 +19101,7 @@
                           <a:latin typeface="Malgun Gothic"/>
                           <a:ea typeface="Malgun Gothic"/>
                         </a:rPr>
-                        <a:t>0.13</a:t>
+                        <a:t>0.36</a:t>
                       </a:r>
                     </a:p>
                   </a:txBody>
@@ -19149,7 +19149,7 @@
                           <a:latin typeface="Malgun Gothic"/>
                           <a:ea typeface="Malgun Gothic"/>
                         </a:rPr>
-                        <a:t>0.13</a:t>
+                        <a:t>0.34</a:t>
                       </a:r>
                     </a:p>
                   </a:txBody>
@@ -19197,7 +19197,7 @@
                           <a:latin typeface="Malgun Gothic"/>
                           <a:ea typeface="Malgun Gothic"/>
                         </a:rPr>
-                        <a:t>0.12</a:t>
+                        <a:t>0.30</a:t>
                       </a:r>
                     </a:p>
                   </a:txBody>
@@ -19247,7 +19247,7 @@
                           <a:latin typeface="Malgun Gothic"/>
                           <a:ea typeface="Malgun Gothic"/>
                         </a:rPr>
-                        <a:t>S1</a:t>
+                        <a:t>T1</a:t>
                       </a:r>
                     </a:p>
                   </a:txBody>
@@ -19343,7 +19343,7 @@
                           <a:latin typeface="Malgun Gothic"/>
                           <a:ea typeface="Malgun Gothic"/>
                         </a:rPr>
-                        <a:t>0.15</a:t>
+                        <a:t>0.38</a:t>
                       </a:r>
                     </a:p>
                   </a:txBody>
@@ -19391,7 +19391,7 @@
                           <a:latin typeface="Malgun Gothic"/>
                           <a:ea typeface="Malgun Gothic"/>
                         </a:rPr>
-                        <a:t>0.11</a:t>
+                        <a:t>0.32</a:t>
                       </a:r>
                     </a:p>
                   </a:txBody>
@@ -19439,7 +19439,7 @@
                           <a:latin typeface="Malgun Gothic"/>
                           <a:ea typeface="Malgun Gothic"/>
                         </a:rPr>
-                        <a:t>0.14</a:t>
+                        <a:t>0.30</a:t>
                       </a:r>
                     </a:p>
                   </a:txBody>
@@ -19489,7 +19489,7 @@
                           <a:latin typeface="Malgun Gothic"/>
                           <a:ea typeface="Malgun Gothic"/>
                         </a:rPr>
-                        <a:t>S2</a:t>
+                        <a:t>T2</a:t>
                       </a:r>
                     </a:p>
                   </a:txBody>
@@ -19585,7 +19585,7 @@
                           <a:latin typeface="Malgun Gothic"/>
                           <a:ea typeface="Malgun Gothic"/>
                         </a:rPr>
-                        <a:t>0.10</a:t>
+                        <a:t>0.35</a:t>
                       </a:r>
                     </a:p>
                   </a:txBody>
@@ -19633,7 +19633,7 @@
                           <a:latin typeface="Malgun Gothic"/>
                           <a:ea typeface="Malgun Gothic"/>
                         </a:rPr>
-                        <a:t>0.17</a:t>
+                        <a:t>0.35</a:t>
                       </a:r>
                     </a:p>
                   </a:txBody>
@@ -19681,7 +19681,7 @@
                           <a:latin typeface="Malgun Gothic"/>
                           <a:ea typeface="Malgun Gothic"/>
                         </a:rPr>
-                        <a:t>0.12</a:t>
+                        <a:t>0.30</a:t>
                       </a:r>
                     </a:p>
                   </a:txBody>
@@ -19728,8 +19728,8 @@
         </p:nvSpPr>
         <p:spPr>
           <a:xfrm>
-            <a:off x="911479" y="5165344"/>
-            <a:ext cx="7321041" cy="218186"/>
+            <a:off x="-133476" y="5165344"/>
+            <a:ext cx="9410953" cy="218186"/>
           </a:xfrm>
           <a:prstGeom prst="rect">
             <a:avLst/>
@@ -19751,7 +19751,7 @@
                 <a:latin typeface="Malgun Gothic"/>
                 <a:ea typeface="Malgun Gothic"/>
               </a:rPr>
-              <a:t>기여도는 셀 / 아크 / 천이 방향 / 조건(when) / slew / load 에 의존하는 표면으로 저장된다 (예시 값)</a:t>
+              <a:t>기여도는 셀 / 아크 / 천이 방향 / 조건(when) / 타이밍 값 종류 / slew / load 에 의존하는 표면으로 저장된다 (예시 값, 행 합 = 1)</a:t>
             </a:r>
           </a:p>
         </p:txBody>
@@ -20903,7 +20903,7 @@
                 <a:latin typeface="Malgun Gothic"/>
                 <a:ea typeface="Malgun Gothic"/>
               </a:rPr>
-              <a:t>(USM / 그룹 섭동)</a:t>
+              <a:t>(집합 민감도 lib / 그룹 섭동)</a:t>
             </a:r>
           </a:p>
         </p:txBody>
@@ -21969,7 +21969,7 @@
                           <a:latin typeface="Malgun Gothic"/>
                           <a:ea typeface="Malgun Gothic"/>
                         </a:rPr>
-                        <a:t>cell / arc / transition / when / slew / load / TR</a:t>
+                        <a:t>cell / arc / transition / when / measure / slew / load / TR</a:t>
                       </a:r>
                     </a:p>
                   </a:txBody>
@@ -22067,7 +22067,7 @@
                           <a:latin typeface="Malgun Gothic"/>
                           <a:ea typeface="Malgun Gothic"/>
                         </a:rPr>
-                        <a:t>cell / arc / transition / parameter / slew / load</a:t>
+                        <a:t>cell / arc / transition / measure / parameter / slew / load</a:t>
                       </a:r>
                     </a:p>
                   </a:txBody>
